--- a/slides/slide_14.pptx
+++ b/slides/slide_14.pptx
@@ -26,61 +26,38 @@
       <p:bold r:id="rId9"/>
     </p:embeddedFont>
     <p:embeddedFont>
-      <p:font typeface="Bebas Neue" panose="020B0606020202050201" pitchFamily="2" charset="0"/>
+      <p:font typeface="Hanken Grotesk" panose="020B0604020202020204" charset="0"/>
       <p:regular r:id="rId10"/>
-    </p:embeddedFont>
-    <p:embeddedFont>
-      <p:font typeface="DM Mono" panose="020B0509040201040103" pitchFamily="1" charset="0"/>
-      <p:regular r:id="rId11"/>
+      <p:bold r:id="rId11"/>
       <p:italic r:id="rId12"/>
-    </p:embeddedFont>
-    <p:embeddedFont>
-      <p:font typeface="Hanken Grotesk" panose="020B0604020202020204" charset="0"/>
-      <p:regular r:id="rId13"/>
-      <p:bold r:id="rId14"/>
-      <p:italic r:id="rId15"/>
-      <p:boldItalic r:id="rId16"/>
-    </p:embeddedFont>
-    <p:embeddedFont>
-      <p:font typeface="Open Sans" panose="020B0606030504020204" pitchFamily="2" charset="0"/>
-      <p:regular r:id="rId17"/>
-      <p:bold r:id="rId18"/>
-      <p:italic r:id="rId19"/>
-      <p:boldItalic r:id="rId20"/>
+      <p:boldItalic r:id="rId13"/>
     </p:embeddedFont>
     <p:embeddedFont>
       <p:font typeface="Raleway" pitchFamily="2" charset="0"/>
-      <p:regular r:id="rId21"/>
-      <p:bold r:id="rId22"/>
-      <p:italic r:id="rId23"/>
-      <p:boldItalic r:id="rId24"/>
+      <p:regular r:id="rId14"/>
+      <p:bold r:id="rId15"/>
+      <p:italic r:id="rId16"/>
+      <p:boldItalic r:id="rId17"/>
     </p:embeddedFont>
     <p:embeddedFont>
       <p:font typeface="Raleway Black" pitchFamily="2" charset="0"/>
-      <p:bold r:id="rId25"/>
-      <p:boldItalic r:id="rId26"/>
+      <p:bold r:id="rId18"/>
+      <p:boldItalic r:id="rId19"/>
     </p:embeddedFont>
     <p:embeddedFont>
       <p:font typeface="Raleway ExtraBold" pitchFamily="2" charset="0"/>
-      <p:bold r:id="rId27"/>
-      <p:boldItalic r:id="rId28"/>
+      <p:bold r:id="rId20"/>
+      <p:boldItalic r:id="rId21"/>
     </p:embeddedFont>
     <p:embeddedFont>
       <p:font typeface="Roboto Medium" panose="02000000000000000000" pitchFamily="2" charset="0"/>
-      <p:regular r:id="rId29"/>
-      <p:italic r:id="rId30"/>
+      <p:regular r:id="rId22"/>
+      <p:italic r:id="rId23"/>
     </p:embeddedFont>
     <p:embeddedFont>
       <p:font typeface="Roboto" panose="02000000000000000000" pitchFamily="2"/>
-      <p:bold r:id="rId31"/>
-      <p:boldItalic r:id="rId32"/>
-    </p:embeddedFont>
-    <p:embeddedFont>
-      <p:font typeface="Segoe UI" panose="020B0502040204020203" pitchFamily="2" charset="0"/>
-      <p:regular r:id="rId33"/>
-      <p:bold r:id="rId34"/>
-      <p:italic r:id="rId35"/>
-      <p:boldItalic r:id="rId36"/>
+      <p:bold r:id="rId24"/>
+      <p:boldItalic r:id="rId25"/>
     </p:embeddedFont>
   </p:embeddedFontLst>
   <p:custDataLst>
@@ -884,7 +861,7 @@
           <a:bodyPr/>
           <a:lstStyle/>
           <a:p>
-            <a:fld id="{20429294-7F26-434E-8F8B-11727417FF67}" type="datetimeFigureOut">
+            <a:fld id="{AE92AAF5-089B-4711-A89E-380314639725}" type="datetimeFigureOut">
               <a:rPr lang="en-US" smtClean="0"/>
               <a:t>11/7/2009</a:t>
             </a:fld>
@@ -1048,7 +1025,7 @@
           <a:bodyPr/>
           <a:lstStyle/>
           <a:p>
-            <a:fld id="{9974CD8A-7382-41B8-87B0-E6D75EF1100E}" type="datetimeFigureOut">
+            <a:fld id="{5A6BD0DD-9EA1-49EA-B415-D2C1BCF94747}" type="datetimeFigureOut">
               <a:rPr lang="en-US" smtClean="0"/>
               <a:t>11/7/2009</a:t>
             </a:fld>
@@ -1212,7 +1189,7 @@
           <a:bodyPr/>
           <a:lstStyle/>
           <a:p>
-            <a:fld id="{7363D7F6-386D-4F21-A390-D9BBC8A57804}" type="datetimeFigureOut">
+            <a:fld id="{0DD6D387-3CA5-4B54-8389-82DFF511B151}" type="datetimeFigureOut">
               <a:rPr lang="en-US" smtClean="0"/>
               <a:t>11/7/2009</a:t>
             </a:fld>
@@ -13117,7 +13094,7 @@
           <a:bodyPr/>
           <a:lstStyle/>
           <a:p>
-            <a:fld id="{CC622FD3-4318-46AE-9593-040A89907CDC}" type="datetimeFigureOut">
+            <a:fld id="{26D48E95-3A62-4781-A917-CD52604A5F0C}" type="datetimeFigureOut">
               <a:rPr lang="en-US" smtClean="0"/>
               <a:t>11/7/2009</a:t>
             </a:fld>
@@ -33218,7 +33195,7 @@
           <a:bodyPr/>
           <a:lstStyle/>
           <a:p>
-            <a:fld id="{430531F5-DA27-4857-8FCA-397F38158459}" type="datetimeFigureOut">
+            <a:fld id="{EEC45042-638E-49A0-899C-205EA7C4F73E}" type="datetimeFigureOut">
               <a:rPr lang="en-US" smtClean="0"/>
               <a:t>11/7/2009</a:t>
             </a:fld>
@@ -38865,7 +38842,7 @@
           <a:bodyPr/>
           <a:lstStyle/>
           <a:p>
-            <a:fld id="{1BB6087B-D2BA-4892-857A-B3BB8213D568}" type="datetimeFigureOut">
+            <a:fld id="{4ECE864A-6646-4475-B153-9C718C757317}" type="datetimeFigureOut">
               <a:rPr lang="en-US" smtClean="0"/>
               <a:t>11/7/2009</a:t>
             </a:fld>
@@ -39254,7 +39231,7 @@
           <a:bodyPr/>
           <a:lstStyle/>
           <a:p>
-            <a:fld id="{01F76CBA-9748-40F4-88D3-A8E2E1F97DE4}" type="datetimeFigureOut">
+            <a:fld id="{C0912E1F-B91E-43E2-B61C-FF32041F8C95}" type="datetimeFigureOut">
               <a:rPr lang="en-US" smtClean="0"/>
               <a:t>11/7/2009</a:t>
             </a:fld>
@@ -39367,7 +39344,7 @@
           <a:bodyPr/>
           <a:lstStyle/>
           <a:p>
-            <a:fld id="{55229574-608F-4C78-AF2F-FAEE2E2BE652}" type="datetimeFigureOut">
+            <a:fld id="{D28CF981-D213-4761-833A-9E5DD65843B0}" type="datetimeFigureOut">
               <a:rPr lang="en-US" smtClean="0"/>
               <a:t>11/7/2009</a:t>
             </a:fld>
@@ -39457,7 +39434,7 @@
           <a:bodyPr/>
           <a:lstStyle/>
           <a:p>
-            <a:fld id="{595382C4-F82E-4BE4-934D-AE1F6DA43036}" type="datetimeFigureOut">
+            <a:fld id="{6CA48625-7B81-42D7-AA0B-8707ABA42F12}" type="datetimeFigureOut">
               <a:rPr lang="en-US" smtClean="0"/>
               <a:t>11/7/2009</a:t>
             </a:fld>
@@ -39712,7 +39689,7 @@
           <a:bodyPr/>
           <a:lstStyle/>
           <a:p>
-            <a:fld id="{B468011A-4FD2-4CDC-8319-F42C6538DA76}" type="datetimeFigureOut">
+            <a:fld id="{64E5D49F-823D-43E5-A5AB-AC7B86AACBFD}" type="datetimeFigureOut">
               <a:rPr lang="en-US" smtClean="0"/>
               <a:t>11/7/2009</a:t>
             </a:fld>
@@ -39944,7 +39921,7 @@
           <a:bodyPr/>
           <a:lstStyle/>
           <a:p>
-            <a:fld id="{D976AD1F-8D9A-4B81-B3AB-F1817A3B7F2A}" type="datetimeFigureOut">
+            <a:fld id="{06687AC9-3C59-421A-9943-295F85AF3C6E}" type="datetimeFigureOut">
               <a:rPr lang="en-US" smtClean="0"/>
               <a:t>11/7/2009</a:t>
             </a:fld>
@@ -42608,10 +42585,16 @@
           <a:lstStyle/>
           <a:p>
             <a:r>
-              <a:rPr lang="en"/>
+              <a:rPr lang="en" b="1">
+                <a:latin typeface="Arial"/>
+                <a:cs typeface="Arial"/>
+              </a:rPr>
               <a:t>ОБЗОР РАЗМЕРА РЫНКА</a:t>
             </a:r>
-            <a:endParaRPr lang="ru-RU"/>
+            <a:endParaRPr lang="ru-RU" b="1">
+              <a:latin typeface="Arial"/>
+              <a:cs typeface="Arial"/>
+            </a:endParaRPr>
           </a:p>
         </p:txBody>
       </p:sp>
@@ -42882,21 +42865,16 @@
                 <a:solidFill>
                   <a:schemeClr val="dk1"/>
                 </a:solidFill>
-                <a:latin typeface="Raleway"/>
                 <a:ea typeface="Raleway"/>
-                <a:cs typeface="Raleway"/>
                 <a:sym typeface="Raleway"/>
               </a:rPr>
               <a:t>$100M</a:t>
             </a:r>
-            <a:endParaRPr sz="2400" b="1">
+            <a:endParaRPr lang="ru-RU" sz="2400" b="1">
               <a:solidFill>
                 <a:schemeClr val="dk1"/>
               </a:solidFill>
-              <a:latin typeface="Raleway"/>
               <a:ea typeface="Raleway"/>
-              <a:cs typeface="Raleway"/>
-              <a:sym typeface="Raleway"/>
             </a:endParaRPr>
           </a:p>
         </p:txBody>
@@ -43168,9 +43146,7 @@
                 <a:solidFill>
                   <a:schemeClr val="lt1"/>
                 </a:solidFill>
-                <a:latin typeface="Raleway"/>
                 <a:ea typeface="Raleway"/>
-                <a:cs typeface="Raleway"/>
                 <a:sym typeface="Raleway"/>
               </a:rPr>
               <a:t>$20M</a:t>
@@ -43179,9 +43155,7 @@
               <a:solidFill>
                 <a:schemeClr val="lt1"/>
               </a:solidFill>
-              <a:latin typeface="Raleway"/>
               <a:ea typeface="Raleway"/>
-              <a:cs typeface="Raleway"/>
               <a:sym typeface="Raleway"/>
             </a:endParaRPr>
           </a:p>
@@ -43454,21 +43428,16 @@
                 <a:solidFill>
                   <a:schemeClr val="accent1"/>
                 </a:solidFill>
-                <a:latin typeface="Raleway"/>
                 <a:ea typeface="Raleway"/>
-                <a:cs typeface="Raleway"/>
                 <a:sym typeface="Raleway"/>
               </a:rPr>
               <a:t>$5M</a:t>
             </a:r>
-            <a:endParaRPr sz="2400" b="1">
+            <a:endParaRPr lang="ru-RU" sz="2400" b="1">
               <a:solidFill>
                 <a:schemeClr val="accent1"/>
               </a:solidFill>
-              <a:latin typeface="Raleway"/>
               <a:ea typeface="Raleway"/>
-              <a:cs typeface="Raleway"/>
-              <a:sym typeface="Raleway"/>
             </a:endParaRPr>
           </a:p>
         </p:txBody>
@@ -43995,24 +43964,14 @@
           </a:lstStyle>
           <a:p>
             <a:r>
-              <a:rPr lang="en" sz="1600">
+              <a:rPr lang="en" sz="1600" b="1">
                 <a:solidFill>
                   <a:schemeClr val="dk1"/>
                 </a:solidFill>
-                <a:latin typeface="Raleway Black"/>
                 <a:ea typeface="Raleway Black"/>
-                <a:cs typeface="Raleway Black"/>
               </a:rPr>
               <a:t>ВНЕШНИЙ КРУГ</a:t>
             </a:r>
-            <a:endParaRPr lang="en" sz="1600">
-              <a:solidFill>
-                <a:schemeClr val="dk1"/>
-              </a:solidFill>
-              <a:latin typeface="Raleway Black"/>
-              <a:ea typeface="Raleway Black"/>
-              <a:cs typeface="Raleway Black"/>
-            </a:endParaRPr>
           </a:p>
         </p:txBody>
       </p:sp>
@@ -44274,17 +44233,15 @@
                 <a:solidFill>
                   <a:schemeClr val="dk1"/>
                 </a:solidFill>
-                <a:latin typeface="Hanken Grotesk"/>
                 <a:ea typeface="Hanken Grotesk"/>
                 <a:sym typeface="Hanken Grotesk"/>
               </a:rPr>
               <a:t>Укажите общий объем рынка, который представляет всю потенциальную клиентскую базу для данного продукта или услуги</a:t>
             </a:r>
-            <a:endParaRPr lang="en" sz="1200" err="1">
+            <a:endParaRPr lang="en" sz="1200">
               <a:solidFill>
                 <a:schemeClr val="dk1"/>
               </a:solidFill>
-              <a:latin typeface="Hanken Grotesk"/>
             </a:endParaRPr>
           </a:p>
         </p:txBody>
@@ -44543,24 +44500,14 @@
           </a:lstStyle>
           <a:p>
             <a:r>
-              <a:rPr lang="en" sz="1600">
+              <a:rPr lang="en" sz="1600" b="1">
                 <a:solidFill>
                   <a:schemeClr val="dk1"/>
                 </a:solidFill>
-                <a:latin typeface="Raleway Black"/>
                 <a:ea typeface="Raleway Black"/>
-                <a:cs typeface="Raleway Black"/>
               </a:rPr>
               <a:t>СРЕДНИЙ КРУГ</a:t>
             </a:r>
-            <a:endParaRPr lang="en" sz="1600">
-              <a:solidFill>
-                <a:schemeClr val="dk1"/>
-              </a:solidFill>
-              <a:latin typeface="Raleway Black"/>
-              <a:ea typeface="Raleway Black"/>
-              <a:cs typeface="Raleway Black"/>
-            </a:endParaRPr>
           </a:p>
         </p:txBody>
       </p:sp>
@@ -44822,7 +44769,6 @@
                 <a:solidFill>
                   <a:schemeClr val="dk1"/>
                 </a:solidFill>
-                <a:latin typeface="Hanken Grotesk"/>
                 <a:ea typeface="Hanken Grotesk"/>
                 <a:sym typeface="Hanken Grotesk"/>
               </a:rPr>
@@ -44830,12 +44776,8 @@
             </a:r>
             <a:br>
               <a:rPr lang="en" sz="1200">
-                <a:solidFill>
-                  <a:schemeClr val="dk1"/>
-                </a:solidFill>
                 <a:latin typeface="Hanken Grotesk"/>
                 <a:ea typeface="Hanken Grotesk"/>
-                <a:sym typeface="Hanken Grotesk"/>
               </a:rPr>
             </a:br>
             <a:endParaRPr lang="en" sz="1200">
@@ -45101,24 +45043,14 @@
           </a:lstStyle>
           <a:p>
             <a:r>
-              <a:rPr lang="en" sz="1600">
+              <a:rPr lang="en" sz="1600" b="1">
                 <a:solidFill>
                   <a:schemeClr val="dk1"/>
                 </a:solidFill>
-                <a:latin typeface="Raleway Black"/>
                 <a:ea typeface="Raleway Black"/>
-                <a:cs typeface="Raleway Black"/>
               </a:rPr>
               <a:t>ВНУТРЕННИЙ КРУГ</a:t>
             </a:r>
-            <a:endParaRPr lang="en" sz="1600">
-              <a:solidFill>
-                <a:schemeClr val="dk1"/>
-              </a:solidFill>
-              <a:latin typeface="Raleway Black"/>
-              <a:ea typeface="Raleway Black"/>
-              <a:cs typeface="Raleway Black"/>
-            </a:endParaRPr>
           </a:p>
         </p:txBody>
       </p:sp>

--- a/slides/slide_14.pptx
+++ b/slides/slide_14.pptx
@@ -861,7 +861,7 @@
           <a:bodyPr/>
           <a:lstStyle/>
           <a:p>
-            <a:fld id="{AE92AAF5-089B-4711-A89E-380314639725}" type="datetimeFigureOut">
+            <a:fld id="{A8E391D0-2761-48FC-82A2-D1AC3C3E3295}" type="datetimeFigureOut">
               <a:rPr lang="en-US" smtClean="0"/>
               <a:t>11/7/2009</a:t>
             </a:fld>
@@ -1025,7 +1025,7 @@
           <a:bodyPr/>
           <a:lstStyle/>
           <a:p>
-            <a:fld id="{5A6BD0DD-9EA1-49EA-B415-D2C1BCF94747}" type="datetimeFigureOut">
+            <a:fld id="{EFE9EDB8-2F64-4028-AF68-8BAEBF043C41}" type="datetimeFigureOut">
               <a:rPr lang="en-US" smtClean="0"/>
               <a:t>11/7/2009</a:t>
             </a:fld>
@@ -1189,7 +1189,7 @@
           <a:bodyPr/>
           <a:lstStyle/>
           <a:p>
-            <a:fld id="{0DD6D387-3CA5-4B54-8389-82DFF511B151}" type="datetimeFigureOut">
+            <a:fld id="{209558F5-7E65-4BB1-A0B9-D8DF3327AFC0}" type="datetimeFigureOut">
               <a:rPr lang="en-US" smtClean="0"/>
               <a:t>11/7/2009</a:t>
             </a:fld>
@@ -13094,7 +13094,7 @@
           <a:bodyPr/>
           <a:lstStyle/>
           <a:p>
-            <a:fld id="{26D48E95-3A62-4781-A917-CD52604A5F0C}" type="datetimeFigureOut">
+            <a:fld id="{D4AB93A5-9C1A-4201-9AAA-BCE832921678}" type="datetimeFigureOut">
               <a:rPr lang="en-US" smtClean="0"/>
               <a:t>11/7/2009</a:t>
             </a:fld>
@@ -33195,7 +33195,7 @@
           <a:bodyPr/>
           <a:lstStyle/>
           <a:p>
-            <a:fld id="{EEC45042-638E-49A0-899C-205EA7C4F73E}" type="datetimeFigureOut">
+            <a:fld id="{81C4D671-C30B-449D-8A33-DD2A540C5AA4}" type="datetimeFigureOut">
               <a:rPr lang="en-US" smtClean="0"/>
               <a:t>11/7/2009</a:t>
             </a:fld>
@@ -38842,7 +38842,7 @@
           <a:bodyPr/>
           <a:lstStyle/>
           <a:p>
-            <a:fld id="{4ECE864A-6646-4475-B153-9C718C757317}" type="datetimeFigureOut">
+            <a:fld id="{36492340-202E-4537-A56F-C1A6AF7DD899}" type="datetimeFigureOut">
               <a:rPr lang="en-US" smtClean="0"/>
               <a:t>11/7/2009</a:t>
             </a:fld>
@@ -39231,7 +39231,7 @@
           <a:bodyPr/>
           <a:lstStyle/>
           <a:p>
-            <a:fld id="{C0912E1F-B91E-43E2-B61C-FF32041F8C95}" type="datetimeFigureOut">
+            <a:fld id="{6E306F3A-307F-488F-97F3-CA03E6B7F32B}" type="datetimeFigureOut">
               <a:rPr lang="en-US" smtClean="0"/>
               <a:t>11/7/2009</a:t>
             </a:fld>
@@ -39344,7 +39344,7 @@
           <a:bodyPr/>
           <a:lstStyle/>
           <a:p>
-            <a:fld id="{D28CF981-D213-4761-833A-9E5DD65843B0}" type="datetimeFigureOut">
+            <a:fld id="{C1B84525-E177-44FD-BDB3-BD550AC49BDB}" type="datetimeFigureOut">
               <a:rPr lang="en-US" smtClean="0"/>
               <a:t>11/7/2009</a:t>
             </a:fld>
@@ -39434,7 +39434,7 @@
           <a:bodyPr/>
           <a:lstStyle/>
           <a:p>
-            <a:fld id="{6CA48625-7B81-42D7-AA0B-8707ABA42F12}" type="datetimeFigureOut">
+            <a:fld id="{E894CCCF-55DC-4654-A74B-DEE7304F64BC}" type="datetimeFigureOut">
               <a:rPr lang="en-US" smtClean="0"/>
               <a:t>11/7/2009</a:t>
             </a:fld>
@@ -39689,7 +39689,7 @@
           <a:bodyPr/>
           <a:lstStyle/>
           <a:p>
-            <a:fld id="{64E5D49F-823D-43E5-A5AB-AC7B86AACBFD}" type="datetimeFigureOut">
+            <a:fld id="{1B917022-EE83-46FD-9730-950D6FFA24EC}" type="datetimeFigureOut">
               <a:rPr lang="en-US" smtClean="0"/>
               <a:t>11/7/2009</a:t>
             </a:fld>
@@ -39921,7 +39921,7 @@
           <a:bodyPr/>
           <a:lstStyle/>
           <a:p>
-            <a:fld id="{06687AC9-3C59-421A-9943-295F85AF3C6E}" type="datetimeFigureOut">
+            <a:fld id="{BB47A02D-6340-43C4-9582-6C15264449AF}" type="datetimeFigureOut">
               <a:rPr lang="en-US" smtClean="0"/>
               <a:t>11/7/2009</a:t>
             </a:fld>
